--- a/12-评审与基线/评审核对成果展示.pptx
+++ b/12-评审与基线/评审核对成果展示.pptx
@@ -3107,7 +3107,7 @@
           <a:lstStyle/>
           <a:p>
             <a:r>
-              <a:t>评审核对成果展示 V1.0</a:t>
+              <a:t>评审核对成果展示 V1.1</a:t>
             </a:r>
           </a:p>
         </p:txBody>
@@ -3159,7 +3159,7 @@
                 </a:solidFill>
                 <a:latin typeface="Microsoft YaHei"/>
               </a:rPr>
-              <a:t>评审计划展示稿｜校务问答机器人｜2026-05-20</a:t>
+              <a:t>问题记录展示稿｜校务问答机器人｜2026-05-22</a:t>
             </a:r>
           </a:p>
         </p:txBody>
@@ -3223,7 +3223,7 @@
               <a:rPr sz="2000">
                 <a:latin typeface="Microsoft YaHei"/>
               </a:rPr>
-              <a:t>版本：V1.0（评审计划）</a:t>
+              <a:t>版本：V1.1（问题记录）</a:t>
             </a:r>
           </a:p>
           <a:p>
@@ -3280,7 +3280,7 @@
           <a:lstStyle/>
           <a:p>
             <a:r>
-              <a:t>评审计划</a:t>
+              <a:t>问题记录</a:t>
             </a:r>
           </a:p>
         </p:txBody>
@@ -3305,7 +3305,7 @@
               <a:rPr sz="2000">
                 <a:latin typeface="Microsoft YaHei"/>
               </a:rPr>
-              <a:t>第一次评审 (R1)：2026-05-20，Vision &amp; Scope + Context Diagram，小组走查(Walkthrough)</a:t>
+              <a:t>R1~R3共记录13项问题</a:t>
             </a:r>
           </a:p>
           <a:p>
@@ -3314,7 +3314,7 @@
               <a:rPr sz="2000">
                 <a:latin typeface="Microsoft YaHei"/>
               </a:rPr>
-              <a:t>第二次评审 (R2)：2026-05-21，用户群识别 + 需求获取 + 原型设计，技术评审(Technical Review)</a:t>
+              <a:t>重点问题：验收标准、场景故事、可用率指标、RTM追溯矩阵</a:t>
             </a:r>
           </a:p>
           <a:p>
@@ -3323,16 +3323,7 @@
               <a:rPr sz="2000">
                 <a:latin typeface="Microsoft YaHei"/>
               </a:rPr>
-              <a:t>第三次评审 (R3)：2026-05-22，用例文档 + 非功能需求 + SRS初稿，正式评审(Inspection)</a:t>
-            </a:r>
-          </a:p>
-          <a:p>
-            <a:pPr/>
-            <a:r>
-              <a:rPr sz="2000">
-                <a:latin typeface="Microsoft YaHei"/>
-              </a:rPr>
-              <a:t>第四次评审 (R4)：2026-05-23，SRS完整版 + 测试用例 + 用户手册，正式评审(Inspection)</a:t>
+              <a:t>R4最终评审和整改闭环待V1.2补充</a:t>
             </a:r>
           </a:p>
         </p:txBody>
@@ -3371,7 +3362,7 @@
           <a:lstStyle/>
           <a:p>
             <a:r>
-              <a:t>核对范围</a:t>
+              <a:t>阶段结论</a:t>
             </a:r>
           </a:p>
         </p:txBody>
@@ -3396,7 +3387,7 @@
               <a:rPr sz="2000">
                 <a:latin typeface="Microsoft YaHei"/>
               </a:rPr>
-              <a:t>建立30项评审核对清单</a:t>
+              <a:t>评审核对项已完成主要检查</a:t>
             </a:r>
           </a:p>
           <a:p>
@@ -3405,7 +3396,7 @@
               <a:rPr sz="2000">
                 <a:latin typeface="Microsoft YaHei"/>
               </a:rPr>
-              <a:t>确定评审角色、记录模板和证据来源</a:t>
+              <a:t>问题进入责任人整改队列</a:t>
             </a:r>
           </a:p>
           <a:p>
@@ -3414,7 +3405,7 @@
               <a:rPr sz="2000">
                 <a:latin typeface="Microsoft YaHei"/>
               </a:rPr>
-              <a:t>问题记录与整改跟踪待后续版本补充</a:t>
+              <a:t>基线发布暂不批准</a:t>
             </a:r>
           </a:p>
         </p:txBody>

--- a/12-评审与基线/评审核对成果展示.pptx
+++ b/12-评审与基线/评审核对成果展示.pptx
@@ -3107,7 +3107,7 @@
           <a:lstStyle/>
           <a:p>
             <a:r>
-              <a:t>评审核对成果展示 V1.1</a:t>
+              <a:t>评审核对成果展示 V1.2</a:t>
             </a:r>
           </a:p>
         </p:txBody>
@@ -3159,7 +3159,7 @@
                 </a:solidFill>
                 <a:latin typeface="Microsoft YaHei"/>
               </a:rPr>
-              <a:t>问题记录展示稿｜校务问答机器人｜2026-05-22</a:t>
+              <a:t>整改跟踪展示稿｜校务问答机器人｜2026-05-23</a:t>
             </a:r>
           </a:p>
         </p:txBody>
@@ -3223,7 +3223,7 @@
               <a:rPr sz="2000">
                 <a:latin typeface="Microsoft YaHei"/>
               </a:rPr>
-              <a:t>版本：V1.1（问题记录）</a:t>
+              <a:t>版本：V1.2（整改跟踪）</a:t>
             </a:r>
           </a:p>
           <a:p>
@@ -3280,7 +3280,7 @@
           <a:lstStyle/>
           <a:p>
             <a:r>
-              <a:t>问题记录</a:t>
+              <a:t>整改跟踪</a:t>
             </a:r>
           </a:p>
         </p:txBody>
@@ -3305,7 +3305,7 @@
               <a:rPr sz="2000">
                 <a:latin typeface="Microsoft YaHei"/>
               </a:rPr>
-              <a:t>R1~R3共记录13项问题</a:t>
+              <a:t>R1~R4共16项问题全部登记</a:t>
             </a:r>
           </a:p>
           <a:p>
@@ -3314,7 +3314,7 @@
               <a:rPr sz="2000">
                 <a:latin typeface="Microsoft YaHei"/>
               </a:rPr>
-              <a:t>重点问题：验收标准、场景故事、可用率指标、RTM追溯矩阵</a:t>
+              <a:t>可用率统一为≥99.5%</a:t>
             </a:r>
           </a:p>
           <a:p>
@@ -3323,7 +3323,7 @@
               <a:rPr sz="2000">
                 <a:latin typeface="Microsoft YaHei"/>
               </a:rPr>
-              <a:t>R4最终评审和整改闭环待V1.2补充</a:t>
+              <a:t>用户代表统一为7位，SRS功能需求统一为47项</a:t>
             </a:r>
           </a:p>
         </p:txBody>
@@ -3362,7 +3362,7 @@
           <a:lstStyle/>
           <a:p>
             <a:r>
-              <a:t>阶段结论</a:t>
+              <a:t>发布准备</a:t>
             </a:r>
           </a:p>
         </p:txBody>
@@ -3387,7 +3387,7 @@
               <a:rPr sz="2000">
                 <a:latin typeface="Microsoft YaHei"/>
               </a:rPr>
-              <a:t>评审核对项已完成主要检查</a:t>
+              <a:t>78个测试用例覆盖发布范围</a:t>
             </a:r>
           </a:p>
           <a:p>
@@ -3396,7 +3396,7 @@
               <a:rPr sz="2000">
                 <a:latin typeface="Microsoft YaHei"/>
               </a:rPr>
-              <a:t>问题进入责任人整改队列</a:t>
+              <a:t>评审核对30项均具备证据</a:t>
             </a:r>
           </a:p>
           <a:p>
@@ -3405,7 +3405,7 @@
               <a:rPr sz="2000">
                 <a:latin typeface="Microsoft YaHei"/>
               </a:rPr>
-              <a:t>基线发布暂不批准</a:t>
+              <a:t>等待V1.3进行最终基线发布展示</a:t>
             </a:r>
           </a:p>
         </p:txBody>
